--- a/EP2/apresentação/slides.pptx
+++ b/EP2/apresentação/slides.pptx
@@ -208,7 +208,7 @@
           <a:p>
             <a:fld id="{FCB1DEBD-122D-9B4C-8A0B-868281EF4485}" type="datetimeFigureOut">
               <a:rPr lang="pt-BR" smtClean="0"/>
-              <a:t>06/05/2025</a:t>
+              <a:t>16/05/2025</a:t>
             </a:fld>
             <a:endParaRPr lang="pt-BR"/>
           </a:p>
@@ -796,7 +796,7 @@
           <a:p>
             <a:fld id="{C128FA71-3A18-48C0-980F-4B68F7F63042}" type="datetime1">
               <a:rPr lang="en-US" smtClean="0"/>
-              <a:t>5/6/25</a:t>
+              <a:t>5/16/25</a:t>
             </a:fld>
             <a:endParaRPr lang="en-US"/>
           </a:p>
@@ -1004,7 +1004,7 @@
           <a:p>
             <a:fld id="{7104EDB3-C0E8-45F8-9E1D-1B6C8D1880C0}" type="datetime1">
               <a:rPr lang="en-US" smtClean="0"/>
-              <a:t>5/6/25</a:t>
+              <a:t>5/16/25</a:t>
             </a:fld>
             <a:endParaRPr lang="en-US"/>
           </a:p>
@@ -1214,7 +1214,7 @@
           <a:p>
             <a:fld id="{9CF0EC4B-54ED-4041-B552-9BA760FA3DBA}" type="datetime1">
               <a:rPr lang="en-US" smtClean="0"/>
-              <a:t>5/6/25</a:t>
+              <a:t>5/16/25</a:t>
             </a:fld>
             <a:endParaRPr lang="en-US"/>
           </a:p>
@@ -1412,7 +1412,7 @@
           <a:p>
             <a:fld id="{51C1210E-201E-4473-82AC-2466F5386C38}" type="datetime1">
               <a:rPr lang="en-US" smtClean="0"/>
-              <a:t>5/6/25</a:t>
+              <a:t>5/16/25</a:t>
             </a:fld>
             <a:endParaRPr lang="en-US"/>
           </a:p>
@@ -1690,7 +1690,7 @@
           <a:p>
             <a:fld id="{B01EA198-6CAB-4B8F-B93F-1F9C8C4B6CE7}" type="datetime1">
               <a:rPr lang="en-US" smtClean="0"/>
-              <a:t>5/6/25</a:t>
+              <a:t>5/16/25</a:t>
             </a:fld>
             <a:endParaRPr lang="en-US"/>
           </a:p>
@@ -1962,7 +1962,7 @@
           <a:p>
             <a:fld id="{CA06041F-4525-44D5-AA4F-332294BF1F56}" type="datetime1">
               <a:rPr lang="en-US" smtClean="0"/>
-              <a:t>5/6/25</a:t>
+              <a:t>5/16/25</a:t>
             </a:fld>
             <a:endParaRPr lang="en-US"/>
           </a:p>
@@ -2386,7 +2386,7 @@
           <a:p>
             <a:fld id="{F9557091-BBDF-4EB9-BA6B-2BB67AC4FC0F}" type="datetime1">
               <a:rPr lang="en-US" smtClean="0"/>
-              <a:t>5/6/25</a:t>
+              <a:t>5/16/25</a:t>
             </a:fld>
             <a:endParaRPr lang="en-US"/>
           </a:p>
@@ -2527,7 +2527,7 @@
           <a:p>
             <a:fld id="{2D6B226B-77A6-410C-9796-083F278E0125}" type="datetime1">
               <a:rPr lang="en-US" smtClean="0"/>
-              <a:t>5/6/25</a:t>
+              <a:t>5/16/25</a:t>
             </a:fld>
             <a:endParaRPr lang="en-US"/>
           </a:p>
@@ -2640,7 +2640,7 @@
           <a:p>
             <a:fld id="{A23A578B-D289-4C40-8593-3D356C49DA58}" type="datetime1">
               <a:rPr lang="en-US" smtClean="0"/>
-              <a:t>5/6/25</a:t>
+              <a:t>5/16/25</a:t>
             </a:fld>
             <a:endParaRPr lang="en-US"/>
           </a:p>
@@ -2959,7 +2959,7 @@
           <a:p>
             <a:fld id="{713DFAE3-14DB-48A7-A80F-80DDB072CE3D}" type="datetime1">
               <a:rPr lang="en-US" smtClean="0"/>
-              <a:t>5/6/25</a:t>
+              <a:t>5/16/25</a:t>
             </a:fld>
             <a:endParaRPr lang="en-US"/>
           </a:p>
@@ -3253,7 +3253,7 @@
           <a:p>
             <a:fld id="{92C5EAEF-6478-4102-8F5D-A5FE9FC97ACB}" type="datetime1">
               <a:rPr lang="en-US" smtClean="0"/>
-              <a:t>5/6/25</a:t>
+              <a:t>5/16/25</a:t>
             </a:fld>
             <a:endParaRPr lang="en-US"/>
           </a:p>
@@ -3494,7 +3494,7 @@
           <a:p>
             <a:fld id="{67F45AC6-C491-4585-A584-9CE2AF7D5500}" type="datetime1">
               <a:rPr lang="en-US" smtClean="0"/>
-              <a:t>5/6/25</a:t>
+              <a:t>5/16/25</a:t>
             </a:fld>
             <a:endParaRPr lang="en-US"/>
           </a:p>
@@ -4668,7 +4668,7 @@
             </a:r>
             <a:r>
               <a:rPr lang="pt-BR" dirty="0"/>
-              <a:t> e </a:t>
+              <a:t> e de </a:t>
             </a:r>
             <a:r>
               <a:rPr lang="pt-BR" dirty="0" err="1"/>
@@ -4687,10 +4687,10 @@
       </p:sp>
       <p:pic>
         <p:nvPicPr>
-          <p:cNvPr id="5" name="Imagem 4" descr="Gráfico, Gráfico de barras&#10;&#10;Descrição gerada automaticamente">
-            <a:extLst>
-              <a:ext uri="{FF2B5EF4-FFF2-40B4-BE49-F238E27FC236}">
-                <a16:creationId xmlns:a16="http://schemas.microsoft.com/office/drawing/2014/main" id="{FB7745A9-E600-0D56-8E84-88BB8674AD98}"/>
+          <p:cNvPr id="4" name="Imagem 3" descr="Gráfico, Gráfico de barras&#10;&#10;Descrição gerada automaticamente">
+            <a:extLst>
+              <a:ext uri="{FF2B5EF4-FFF2-40B4-BE49-F238E27FC236}">
+                <a16:creationId xmlns:a16="http://schemas.microsoft.com/office/drawing/2014/main" id="{165F3A2D-683C-3EB3-36BA-228F00400726}"/>
               </a:ext>
             </a:extLst>
           </p:cNvPr>
@@ -4707,8 +4707,8 @@
         </p:blipFill>
         <p:spPr>
           <a:xfrm>
-            <a:off x="6228609" y="1114768"/>
-            <a:ext cx="5350743" cy="4541314"/>
+            <a:off x="5939437" y="1228557"/>
+            <a:ext cx="5917576" cy="4936807"/>
           </a:xfrm>
           <a:prstGeom prst="rect">
             <a:avLst/>
@@ -5006,7 +5006,7 @@
         </p:spPr>
         <p:txBody>
           <a:bodyPr vert="horz" lIns="91440" tIns="45720" rIns="91440" bIns="45720" rtlCol="0">
-            <a:normAutofit fontScale="92500" lnSpcReduction="10000"/>
+            <a:normAutofit/>
           </a:bodyPr>
           <a:lstStyle>
             <a:lvl1pPr marL="228600" indent="-228600" algn="l" defTabSz="914400" rtl="0" eaLnBrk="1" latinLnBrk="0" hangingPunct="1">
@@ -5179,15 +5179,15 @@
             </a:pPr>
             <a:r>
               <a:rPr lang="pt-BR" dirty="0"/>
-              <a:t>À primeira vista, este resultado parece fora de lugar. Entretanto, ele revela que, na verdade, o maior gasto de memória é impactado muito mais pela </a:t>
+              <a:t>Aqui, embora a memória gasta aumente com o tamanho da pista, o aumento em si é bem pequeno. Isso indica que há uma </a:t>
             </a:r>
             <a:r>
               <a:rPr lang="pt-BR" b="1" dirty="0"/>
-              <a:t>quantidade de ciclistas</a:t>
-            </a:r>
-            <a:r>
-              <a:rPr lang="pt-BR" dirty="0"/>
-              <a:t> que pelo tamanho da pista</a:t>
+              <a:t>correlação mais forte entre ciclistas e memória</a:t>
+            </a:r>
+            <a:r>
+              <a:rPr lang="pt-BR" dirty="0"/>
+              <a:t> do que tamanho de pista e memória</a:t>
             </a:r>
           </a:p>
           <a:p>
@@ -5215,29 +5215,17 @@
             </a:pPr>
             <a:r>
               <a:rPr lang="pt-BR" dirty="0"/>
-              <a:t>Por consequência, na pista de 30m (menor tamanho que suporta 150 ciclistas) esse volume pode ficar muito grande, acarretando o resultado observado, em que a </a:t>
-            </a:r>
-            <a:r>
-              <a:rPr lang="pt-BR" b="1" dirty="0"/>
-              <a:t>pista pequena</a:t>
-            </a:r>
-            <a:r>
-              <a:rPr lang="pt-BR" dirty="0"/>
-              <a:t> teve que usar, em geral, </a:t>
-            </a:r>
-            <a:r>
-              <a:rPr lang="pt-BR" b="1" dirty="0"/>
-              <a:t>mais memória que a média</a:t>
+              <a:t>O tamanho da pista acaba por impactar apenas algumas matrizes e vetores de tamanho fixo, que dependem dele</a:t>
             </a:r>
           </a:p>
         </p:txBody>
       </p:sp>
       <p:pic>
         <p:nvPicPr>
-          <p:cNvPr id="4" name="Imagem 3" descr="Gráfico, Gráfico de barras&#10;&#10;Descrição gerada automaticamente">
-            <a:extLst>
-              <a:ext uri="{FF2B5EF4-FFF2-40B4-BE49-F238E27FC236}">
-                <a16:creationId xmlns:a16="http://schemas.microsoft.com/office/drawing/2014/main" id="{0025BC32-7095-4F09-141E-DAA795600504}"/>
+          <p:cNvPr id="5" name="Imagem 4" descr="Gráfico, Gráfico de barras&#10;&#10;Descrição gerada automaticamente">
+            <a:extLst>
+              <a:ext uri="{FF2B5EF4-FFF2-40B4-BE49-F238E27FC236}">
+                <a16:creationId xmlns:a16="http://schemas.microsoft.com/office/drawing/2014/main" id="{28B707E3-1213-7C84-9F20-54D9CFCA2FAB}"/>
               </a:ext>
             </a:extLst>
           </p:cNvPr>
@@ -5254,8 +5242,8 @@
         </p:blipFill>
         <p:spPr>
           <a:xfrm>
-            <a:off x="6217173" y="1108358"/>
-            <a:ext cx="5362179" cy="4407729"/>
+            <a:off x="6096001" y="1282262"/>
+            <a:ext cx="5644898" cy="4866290"/>
           </a:xfrm>
           <a:prstGeom prst="rect">
             <a:avLst/>
@@ -6267,14 +6255,14 @@
             <a:pPr lvl="1"/>
             <a:r>
               <a:rPr lang="pt-BR" dirty="0"/>
-              <a:t>Para um tamanho de pista fixo (90m), variamos a quantidade de ciclistas entre poucos (30), normal (150) e muitos (450)</a:t>
+              <a:t>Para um tamanho de pista fixo (100m), variamos a quantidade de ciclistas entre poucos (30), normal (150) e muitos (450)</a:t>
             </a:r>
           </a:p>
           <a:p>
             <a:pPr lvl="1"/>
             <a:r>
               <a:rPr lang="pt-BR" dirty="0"/>
-              <a:t>Para uma quantidade de ciclistas fixa (150), variamos o tamanho da pista entre pequena (30m), média (150m) e grande (500m)</a:t>
+              <a:t>Para uma quantidade de ciclistas fixa (100), variamos o tamanho da pista entre pequena (100m), média (300m) e grande (600m)</a:t>
             </a:r>
           </a:p>
           <a:p>
@@ -6626,35 +6614,6 @@
           </a:p>
         </p:txBody>
       </p:sp>
-      <p:pic>
-        <p:nvPicPr>
-          <p:cNvPr id="5" name="Espaço Reservado para Conteúdo 4" descr="Gráfico, Gráfico de cascata&#10;&#10;Descrição gerada automaticamente">
-            <a:extLst>
-              <a:ext uri="{FF2B5EF4-FFF2-40B4-BE49-F238E27FC236}">
-                <a16:creationId xmlns:a16="http://schemas.microsoft.com/office/drawing/2014/main" id="{3C89A3AB-89CA-59A0-085C-2A2D09CC6B48}"/>
-              </a:ext>
-            </a:extLst>
-          </p:cNvPr>
-          <p:cNvPicPr>
-            <a:picLocks noGrp="1" noChangeAspect="1"/>
-          </p:cNvPicPr>
-          <p:nvPr>
-            <p:ph idx="1"/>
-          </p:nvPr>
-        </p:nvPicPr>
-        <p:blipFill>
-          <a:blip r:embed="rId2"/>
-          <a:stretch>
-            <a:fillRect/>
-          </a:stretch>
-        </p:blipFill>
-        <p:spPr>
-          <a:xfrm>
-            <a:off x="6228609" y="1114768"/>
-            <a:ext cx="5350743" cy="4373119"/>
-          </a:xfrm>
-        </p:spPr>
-      </p:pic>
       <p:sp>
         <p:nvSpPr>
           <p:cNvPr id="6" name="Espaço Reservado para Conteúdo 2">
@@ -7071,7 +7030,7 @@
             </a:r>
             <a:r>
               <a:rPr lang="pt-BR" dirty="0"/>
-              <a:t> com o aumento dos ciclistas, sendo (pela média) a eficiente 22% mais rápida para 30 ciclistas, 28% para 150, e 65% para 450</a:t>
+              <a:t> com o aumento dos ciclistas, sendo (pela média) a eficiente em torno de  30% mais rápida para 30 e 150 ciclistas, mas 62% para 450</a:t>
             </a:r>
           </a:p>
           <a:p>
@@ -7081,7 +7040,7 @@
             </a:pPr>
             <a:r>
               <a:rPr lang="pt-BR" dirty="0"/>
-              <a:t>Isso ocorre pelo aumento de ciclistas em espera desnecessária, que eleva o tempo de cada turno</a:t>
+              <a:t>Isso ocorre pelo aumento de ciclistas em espera desnecessária, que eleva o tempo de cada turno, junto de mais turnos necessários</a:t>
             </a:r>
           </a:p>
           <a:p>
@@ -7096,6 +7055,35 @@
           </a:p>
         </p:txBody>
       </p:sp>
+      <p:pic>
+        <p:nvPicPr>
+          <p:cNvPr id="9" name="Espaço Reservado para Conteúdo 8" descr="Gráfico, Gráfico de barras&#10;&#10;Descrição gerada automaticamente">
+            <a:extLst>
+              <a:ext uri="{FF2B5EF4-FFF2-40B4-BE49-F238E27FC236}">
+                <a16:creationId xmlns:a16="http://schemas.microsoft.com/office/drawing/2014/main" id="{69C36196-B009-1325-45BA-FEFA85DB78B3}"/>
+              </a:ext>
+            </a:extLst>
+          </p:cNvPr>
+          <p:cNvPicPr>
+            <a:picLocks noGrp="1" noChangeAspect="1"/>
+          </p:cNvPicPr>
+          <p:nvPr>
+            <p:ph idx="1"/>
+          </p:nvPr>
+        </p:nvPicPr>
+        <p:blipFill>
+          <a:blip r:embed="rId2"/>
+          <a:stretch>
+            <a:fillRect/>
+          </a:stretch>
+        </p:blipFill>
+        <p:spPr>
+          <a:xfrm>
+            <a:off x="6228609" y="1314982"/>
+            <a:ext cx="5513254" cy="4763957"/>
+          </a:xfrm>
+        </p:spPr>
+      </p:pic>
     </p:spTree>
     <p:extLst>
       <p:ext uri="{BB962C8B-B14F-4D97-AF65-F5344CB8AC3E}">
@@ -7596,17 +7584,17 @@
             </a:r>
             <a:r>
               <a:rPr lang="pt-BR" dirty="0"/>
-              <a:t>. Isso faz sentido, pois o tempo extra da ingênua é dado pela quantidade de ciclistas esperando desnecessariamente. Logo, sem aumentar os ciclistas, esse tempo a mais é proporcionalmente o mesmo</a:t>
+              <a:t>. Isso faz sentido, pois o tempo extra da ingênua é dado apenas pela quantidade de ciclistas esperando desnecessariamente. Logo, sem aumentar os ciclistas, esse tempo a mais é proporcionalmente o mesmo</a:t>
             </a:r>
           </a:p>
         </p:txBody>
       </p:sp>
       <p:pic>
         <p:nvPicPr>
-          <p:cNvPr id="4" name="Imagem 3" descr="Gráfico, Gráfico de barras&#10;&#10;Descrição gerada automaticamente">
-            <a:extLst>
-              <a:ext uri="{FF2B5EF4-FFF2-40B4-BE49-F238E27FC236}">
-                <a16:creationId xmlns:a16="http://schemas.microsoft.com/office/drawing/2014/main" id="{71F69C1C-4981-25FF-2A52-96F8AF51EABE}"/>
+          <p:cNvPr id="5" name="Imagem 4" descr="Gráfico, Gráfico de barras&#10;&#10;Descrição gerada automaticamente">
+            <a:extLst>
+              <a:ext uri="{FF2B5EF4-FFF2-40B4-BE49-F238E27FC236}">
+                <a16:creationId xmlns:a16="http://schemas.microsoft.com/office/drawing/2014/main" id="{813A0427-D636-E9D1-9A2E-04E0D2529341}"/>
               </a:ext>
             </a:extLst>
           </p:cNvPr>
@@ -7623,8 +7611,8 @@
         </p:blipFill>
         <p:spPr>
           <a:xfrm>
-            <a:off x="6228609" y="1163036"/>
-            <a:ext cx="5350743" cy="4293676"/>
+            <a:off x="6096001" y="1334814"/>
+            <a:ext cx="5668262" cy="4701784"/>
           </a:xfrm>
           <a:prstGeom prst="rect">
             <a:avLst/>
